--- a/curriculum/M02/W09/L02/slides.pptx
+++ b/curriculum/M02/W09/L02/slides.pptx
@@ -620,7 +620,7 @@
           <a:lstStyle/>
           <a:p>
             <a:r>
-              <a:t>Vitamin D의 활성화는 간의 25-수산화와 신장의 1α-수산화 두 단계로 이루어진다. 만성 신질환에서는 신장의 1α-hydroxylase(CYP27B1) 활성이 떨어져 25-OH-D가 정상이어도 활성형인 1,25-dihydroxyvitamin D가 부족해진다. 활성형이 부족하면 소장의 칼슘 흡수가 줄어 저칼슘혈증이 생기고, 이것이 PTH 분비를 자극해 이차성 부갑상선기능항진증으로 이어진다. 따라서 일반 vitamin D 보충으로는 교정되지 않으며 calcitriol 같은 활성형 유사체를 투여해야 한다.</a:t>
+              <a:t>Vitamin D의 활성화는 간의 간의 25-hydroxylation과 신장의 1α-hydroxylation 두 단계로 이루어진다. 만성 신질환에서는 신장의 1α-hydroxylase(CYP27B1) 활성이 떨어져 25-OH-D가 정상이어도 활성형인 1,25-dihydroxyvitamin D가 부족해진다. 활성형이 부족하면 소장의 칼슘 흡수가 줄어 저칼슘혈증이 생기고, 이것이 PTH 분비를 자극해 이차성 부갑상선기능항진증으로 이어진다. 따라서 일반 vitamin D 보충으로는 교정되지 않으며 calcitriol 같은 활성형 유사체를 투여해야 한다.</a:t>
             </a:r>
           </a:p>
         </p:txBody>
@@ -1180,7 +1180,7 @@
           <a:lstStyle/>
           <a:p>
             <a:r>
-              <a:t>접합은 담즙산의 pKa를 낮춘다. 접합되지 않은 담즙산의 pKa는 약 6이어서 소장의 pH에서 상당 부분이 비이온형으로 존재하지만, 접합하면 pKa가 1~4로 떨어져 장 내강에서 거의 완전히 이온화된 염 형태가 된다. 이온화된 분자는 계면활성 능력이 커서 지방을 효과적으로 유화하고, 동시에 막을 수동확산으로 통과하지 못해 장 내강에 머문다. 그 결과 소화 작용을 끝까지 수행한 뒤 회장 말단의 능동수송체를 통해서만 재흡수된다.</a:t>
+              <a:t>접합은 담즙산의 pKa를 낮춘다. 접합되지 않은 담즙산의 pKa는 약 6이어서 소장의 pH에서 상당 부분이 비이온형으로 존재하지만, 접합하면 pKa가 1~4로 떨어져 장 내강에서 거의 완전히 이온화된 염 형태가 된다. 이온화된 분자는 계면활성 능력이 커서 지방을 효과적으로 emulsification하고, 동시에 막을 수동확산으로 통과하지 못해 장 내강에 머문다. 그 결과 소화 작용을 끝까지 수행한 뒤 회장 말단의 능동수송체를 통해서만 재흡수된다.</a:t>
             </a:r>
           </a:p>
         </p:txBody>
@@ -5178,7 +5178,7 @@
                 <a:ea typeface="Malgun Gothic"/>
                 <a:cs typeface="Malgun Gothic"/>
               </a:rPr>
-              <a:t>활면소포체(smooth endoplasmic reticulum)</a:t>
+              <a:t>smooth endoplasmic reticulum(smooth ER)</a:t>
             </a:r>
             <a:r>
               <a:rPr sz="1600" b="0" i="0">
@@ -6033,7 +6033,7 @@
                           <a:ea typeface="Malgun Gothic"/>
                           <a:cs typeface="Malgun Gothic"/>
                         </a:rPr>
-                        <a:t>ATP 3분자 소비, 탈탄산</a:t>
+                        <a:t>ATP 3분자 소비, decarboxylation</a:t>
                       </a:r>
                     </a:p>
                   </a:txBody>
@@ -6616,7 +6616,7 @@
                 <a:ea typeface="Malgun Gothic"/>
                 <a:cs typeface="Malgun Gothic"/>
               </a:rPr>
-              <a:t>에서 C6의 mevalonate가 ATP 세 분자를 써서 인산화된 뒤 탈탄산되어 </a:t>
+              <a:t>에서 C6의 mevalonate가 ATP 세 분자를 써서 인산화된 뒤 decarboxylation을 거쳐 </a:t>
             </a:r>
             <a:r>
               <a:rPr sz="1400" b="1" i="0">
@@ -11928,7 +11928,7 @@
                 <a:ea typeface="Malgun Gothic"/>
                 <a:cs typeface="Malgun Gothic"/>
               </a:rPr>
-              <a:t>LDL receptor를 통한 흡수는 수용체 매개 세포내섭취(receptor-mediated endocytosis)의 교과서적 사례다.</a:t>
+              <a:t>LDL receptor를 통한 흡수는 receptor-mediated endocytosis의 교과서적 사례다.</a:t>
             </a:r>
             <a:r>
               <a:rPr sz="1400" b="0" i="0">
@@ -12012,7 +12012,7 @@
                 <a:ea typeface="Malgun Gothic"/>
                 <a:cs typeface="Malgun Gothic"/>
               </a:rPr>
-              <a:t>을 인식해 결합한다(IDL의 apoE도 인식한다). 3. 피막소포가 떨어져 나와 세포 안으로 들어가고 clathrin이 벗겨진다. 4. </a:t>
+              <a:t>을 인식해 결합한다(IDL의 apoE도 인식한다). 3. coated vesicle이 떨어져 나와 세포 안으로 들어가고 clathrin이 벗겨진다. 4. </a:t>
             </a:r>
             <a:r>
               <a:rPr sz="1400" b="1" i="0">
@@ -13650,7 +13650,7 @@
                 <a:ea typeface="Malgun Gothic"/>
                 <a:cs typeface="Malgun Gothic"/>
               </a:rPr>
-              <a:t>(cholesterol 7α-hydroxylase)이 cholesterol의 C7에 수산기를 붙이는 것이다. 이후 고리의 추가 수산화, 이중결합 환원, 곁사슬 단축을 거쳐 탄소 24개의 </a:t>
+              <a:t>(cholesterol 7α-hydroxylase)이 cholesterol의 C7에 hydroxyl기를 붙이는 것이다. 이후 고리의 추가 hydroxylation, 이중결합 환원, 곁사슬 단축을 거쳐 탄소 24개의 </a:t>
             </a:r>
             <a:r>
               <a:rPr sz="1400" b="1" i="0">
@@ -13712,7 +13712,7 @@
                 <a:ea typeface="Malgun Gothic"/>
                 <a:cs typeface="Malgun Gothic"/>
               </a:rPr>
-              <a:t> — 수산기 3개(C3, C7, C12)</a:t>
+              <a:t> — hydroxyl기 3개(C3, C7, C12)</a:t>
             </a:r>
           </a:p>
           <a:p>
@@ -13752,7 +13752,7 @@
                 <a:ea typeface="Malgun Gothic"/>
                 <a:cs typeface="Malgun Gothic"/>
               </a:rPr>
-              <a:t> — 수산기 2개(C3, C7)</a:t>
+              <a:t> — hydroxyl기 2개(C3, C7)</a:t>
             </a:r>
           </a:p>
           <a:p>
@@ -13858,7 +13858,7 @@
                 <a:ea typeface="Malgun Gothic"/>
                 <a:cs typeface="Malgun Gothic"/>
               </a:rPr>
-              <a:t> 형태가 된다. 이온화된 분자는 계면활성 능력이 크고 막을 그냥 통과하지 못하므로 장 내강에 머물며 지방을 유화할 수 있다.</a:t>
+              <a:t> 형태가 된다. 이온화된 분자는 계면활성 능력이 크고 막을 그냥 통과하지 못하므로 장 내강에 머물며 지방을 emulsification할 수 있다.</a:t>
             </a:r>
           </a:p>
         </p:txBody>
@@ -14165,7 +14165,7 @@
                 <a:ea typeface="Malgun Gothic"/>
                 <a:cs typeface="Malgun Gothic"/>
               </a:rPr>
-              <a:t> 회장과 대장의 세균이 접합을 떼어내고(deconjugation) C7의 수산기를 제거하면(7α-dehydroxylation) </a:t>
+              <a:t> 회장과 대장의 세균이 접합을 떼어내고(deconjugation) C7의 hydroxyl기를 제거하면(7α-dehydroxylation) </a:t>
             </a:r>
             <a:r>
               <a:rPr sz="1600" b="1" i="0">
@@ -16825,7 +16825,7 @@
                           <a:ea typeface="Malgun Gothic"/>
                           <a:cs typeface="Malgun Gothic"/>
                         </a:rPr>
-                        <a:t>부신피질 사구대</a:t>
+                        <a:t>부신피질 zona glomerulosa</a:t>
                       </a:r>
                     </a:p>
                   </a:txBody>
@@ -16923,7 +16923,7 @@
                           <a:ea typeface="Malgun Gothic"/>
                           <a:cs typeface="Malgun Gothic"/>
                         </a:rPr>
-                        <a:t>부신피질 속상대</a:t>
+                        <a:t>부신피질 zona fasciculata</a:t>
                       </a:r>
                     </a:p>
                   </a:txBody>
@@ -17021,7 +17021,7 @@
                           <a:ea typeface="Malgun Gothic"/>
                           <a:cs typeface="Malgun Gothic"/>
                         </a:rPr>
-                        <a:t>정소, 부신피질 망상대</a:t>
+                        <a:t>정소, 부신피질 zona reticularis</a:t>
                       </a:r>
                     </a:p>
                   </a:txBody>
@@ -17436,7 +17436,7 @@
                 <a:ea typeface="Malgun Gothic"/>
                 <a:cs typeface="Malgun Gothic"/>
               </a:rPr>
-              <a:t>사구대</a:t>
+              <a:t>zona glomerulosa</a:t>
             </a:r>
             <a:r>
               <a:rPr sz="2000" b="0" i="0">
@@ -17458,7 +17458,7 @@
                 <a:ea typeface="Malgun Gothic"/>
                 <a:cs typeface="Malgun Gothic"/>
               </a:rPr>
-              <a:t>속상대</a:t>
+              <a:t>zona fasciculata</a:t>
             </a:r>
             <a:r>
               <a:rPr sz="2000" b="0" i="0">
@@ -17480,7 +17480,7 @@
                 <a:ea typeface="Malgun Gothic"/>
                 <a:cs typeface="Malgun Gothic"/>
               </a:rPr>
-              <a:t>망상대</a:t>
+              <a:t>zona reticularis</a:t>
             </a:r>
             <a:r>
               <a:rPr sz="2000" b="0" i="0">
@@ -18342,7 +18342,7 @@
                 <a:ea typeface="Malgun Gothic"/>
                 <a:cs typeface="Malgun Gothic"/>
               </a:rPr>
-              <a:t>활성화는 두 번의 수산화로 완성되며, 두 기관이 나누어 맡는다.</a:t>
+              <a:t>활성화는 두 번의 hydroxylation으로 완성되며, 두 기관이 나누어 맡는다.</a:t>
             </a:r>
           </a:p>
           <a:p>
@@ -18393,7 +18393,7 @@
                 <a:ea typeface="Malgun Gothic"/>
                 <a:cs typeface="Malgun Gothic"/>
               </a:rPr>
-              <a:t>에서 C25가 수산화되어 </a:t>
+              <a:t>에서 C25가 hydroxylation되어 </a:t>
             </a:r>
             <a:r>
               <a:rPr sz="1400" b="1" i="0">
@@ -18481,7 +18481,7 @@
                 <a:ea typeface="Malgun Gothic"/>
                 <a:cs typeface="Malgun Gothic"/>
               </a:rPr>
-              <a:t>가 C1을 수산화해 </a:t>
+              <a:t>가 C1을 hydroxylation해 </a:t>
             </a:r>
             <a:r>
               <a:rPr sz="1400" b="1" i="0">
@@ -22599,7 +22599,7 @@
                 <a:ea typeface="Malgun Gothic"/>
                 <a:cs typeface="Malgun Gothic"/>
               </a:rPr>
-              <a:t>접합은 담즙산의 pKa를 낮춘다. 접합되지 않은 담즙산의 pKa는 약 6이어서 소장의 pH에서 상당 부분이 비이온형으로 존재하지만, 접합하면 pKa가 1~4로 떨어져 장 내강에서 거의 완전히 이온화된 염 형태가 된다. 이온화된 분자는 계면활성 능력이 커서 지방을 효과적으로 유화하고, 동시에 막을 수동확산으로 통과하지 못해 장 내강에 머문다. 그 결과 소화 작용을 끝까지 수행한 뒤 회장 말단의 능동수송체를 통해서만 재흡수된다.</a:t>
+              <a:t>접합은 담즙산의 pKa를 낮춘다. 접합되지 않은 담즙산의 pKa는 약 6이어서 소장의 pH에서 상당 부분이 비이온형으로 존재하지만, 접합하면 pKa가 1~4로 떨어져 장 내강에서 거의 완전히 이온화된 염 형태가 된다. 이온화된 분자는 계면활성 능력이 커서 지방을 효과적으로 emulsification하고, 동시에 막을 수동확산으로 통과하지 못해 장 내강에 머문다. 그 결과 소화 작용을 끝까지 수행한 뒤 회장 말단의 능동수송체를 통해서만 재흡수된다.</a:t>
             </a:r>
           </a:p>
         </p:txBody>
@@ -23295,7 +23295,7 @@
                 <a:ea typeface="Malgun Gothic"/>
                 <a:cs typeface="Malgun Gothic"/>
               </a:rPr>
-              <a:t>Vitamin D의 활성화는 간의 25-수산화와 신장의 1α-수산화 두 단계로 이루어진다. 만성 신질환에서는 신장의 1α-hydroxylase(CYP27B1) 활성이 떨어져 25-OH-D가 정상이어도 활성형인 1,25-dihydroxyvitamin D가 부족해진다. 활성형이 부족하면 소장의 칼슘 흡수가 줄어 저칼슘혈증이 생기고, 이것이 PTH 분비를 자극해 이차성 부갑상선기능항진증으로 이어진다. 따라서 일반 vitamin D 보충으로는 교정되지 않으며 calcitriol 같은 활성형 유사체를 투여해야 한다.</a:t>
+              <a:t>Vitamin D의 활성화는 간의 간의 25-hydroxylation과 신장의 1α-hydroxylation 두 단계로 이루어진다. 만성 신질환에서는 신장의 1α-hydroxylase(CYP27B1) 활성이 떨어져 25-OH-D가 정상이어도 활성형인 1,25-dihydroxyvitamin D가 부족해진다. 활성형이 부족하면 소장의 칼슘 흡수가 줄어 저칼슘혈증이 생기고, 이것이 PTH 분비를 자극해 이차성 부갑상선기능항진증으로 이어진다. 따라서 일반 vitamin D 보충으로는 교정되지 않으며 calcitriol 같은 활성형 유사체를 투여해야 한다.</a:t>
             </a:r>
           </a:p>
         </p:txBody>
@@ -25572,7 +25572,7 @@
                 <a:ea typeface="Malgun Gothic"/>
                 <a:cs typeface="Malgun Gothic"/>
               </a:rPr>
-              <a:t>(양친매성)이라고 한다.</a:t>
+              <a:t>이라고 한다.</a:t>
             </a:r>
           </a:p>
           <a:p>
@@ -26112,7 +26112,7 @@
                 <a:ea typeface="Malgun Gothic"/>
                 <a:cs typeface="Malgun Gothic"/>
               </a:rPr>
-              <a:t>가 된다. 에스터 결합이란 alcohol의 -OH와 carboxylic acid의 -COOH가 물 한 분자를 잃으면서 연결되는 결합이다. 이렇게 되면 유일하게 물과 친했던 -OH가 가려지므로 분자 전체가 거의 완전히 소수성이 된다. 그만큼 더 빽빽하게 쌓을 수 있어, 세포 안의 지질방울이나 lipoprotein 입자의 중심부에 저장 형태로 들어간다.</a:t>
+              <a:t>가 된다. 에스터 결합이란 alcohol의 -OH와 carboxylic acid의 -COOH가 물 한 분자를 잃으면서 연결되는 결합이다. 이렇게 되면 유일하게 물과 친했던 -OH가 가려지므로 분자 전체가 거의 완전히 소수성이 된다. 그만큼 더 빽빽하게 쌓을 수 있어, 세포 안의 lipid droplet이나 lipoprotein 입자의 중심부에 저장 형태로 들어간다.</a:t>
             </a:r>
           </a:p>
           <a:p>
@@ -26800,7 +26800,7 @@
                           <a:ea typeface="Malgun Gothic"/>
                           <a:cs typeface="Malgun Gothic"/>
                         </a:rPr>
-                        <a:t>세포질 지질방울, lipoprotein 중심</a:t>
+                        <a:t>세포질 lipid droplet, lipoprotein 중심</a:t>
                       </a:r>
                     </a:p>
                   </a:txBody>
